--- a/assets/pptx-tpl/brat-green-1.pptx
+++ b/assets/pptx-tpl/brat-green-1.pptx
@@ -21359,7 +21359,7 @@
                 <a:cs typeface="Arial"/>
                 <a:sym typeface="Arial"/>
               </a:rPr>
-              <a:t>Багаараа хамтран шинэ шийдэл хэрэгжүүлнэ. Зах зээлийн судалгаанд үндэслэн шийдвэр гаргана. Дараагийн алхмуудаа тодорхой төлөвлөнө. Өсөлтийг тогтмол хэмжиж, сайжруулна. Энэ хэсэгт өөрийн текстээ оруулна уу.</a:t>
+              <a:t>Товч бөгөөд ойлгомжтой тайлбар. Үзэгчдэд хэрэгтэй мэдээллийг өгнө. Тоо баримт, жишээ ашиглавал илүү үр дүнтэй. Бид хэрэглэгчдэдээ үнэ цэн бүтээхийг зорьдог. Төслийн явц, үр дүнг энд харуулна. Багаараа хамтран шинэ шийдэл хэрэгжүүлнэ.</a:t>
             </a:r>
             <a:endParaRPr/>
           </a:p>
@@ -25101,7 +25101,7 @@
                 <a:cs typeface="Arial"/>
                 <a:sym typeface="Arial"/>
               </a:rPr>
-              <a:t>Гол үзүүлэлтүүдээ товч дурдана. Хэрэглэгчийн хэрэгцээг нарийн судална. </a:t>
+              <a:t>Зах зээлийн судалгаанд үндэслэн шийдвэр гаргана. Дараагийн алхмуудаа тодорхой төлөвлөнө. </a:t>
             </a:r>
             <a:endParaRPr/>
           </a:p>
@@ -25286,7 +25286,7 @@
                 <a:cs typeface="Arial"/>
                 <a:sym typeface="Arial"/>
               </a:rPr>
-              <a:t>Чанар, хурд, найдвартай байдлыг эрхэмлэнэ. Шинэ боломжийг цаг алдалгүй ашиглана. </a:t>
+              <a:t>Өсөлтийг тогтмол хэмжиж, сайжруулна. Энэ хэсэгт өөрийн текстээ оруулна уу. </a:t>
             </a:r>
             <a:endParaRPr/>
           </a:p>
@@ -25471,7 +25471,7 @@
                 <a:cs typeface="Arial"/>
                 <a:sym typeface="Arial"/>
               </a:rPr>
-              <a:t>Үр дүнд суурилсан шийдлийг санал болгоно. Харилцагчидтайгаа урт хугацааны түншлэл тогтооно. </a:t>
+              <a:t>Гол үзүүлэлтүүдээ товч дурдана. Хэрэглэгчийн хэрэгцээг нарийн судална. </a:t>
             </a:r>
             <a:endParaRPr/>
           </a:p>
@@ -25868,7 +25868,7 @@
                 <a:cs typeface="Arial"/>
                 <a:sym typeface="Arial"/>
               </a:rPr>
-              <a:t>Багаараа хамтран шинэ шийдэл хэрэгжүүлнэ. Зах зээлийн судалгаанд үндэслэн шийдвэр гаргана. </a:t>
+              <a:t>Энд гол санаагаа бичнэ үү. Товч бөгөөд ойлгомжтой тайлбар. Үзэгчдэд хэрэгтэй мэдээллийг өгнө. </a:t>
             </a:r>
             <a:endParaRPr/>
           </a:p>
@@ -26154,7 +26154,7 @@
                 <a:cs typeface="Arial"/>
                 <a:sym typeface="Arial"/>
               </a:rPr>
-              <a:t>Дараагийн алхмуудаа тодорхой төлөвлөнө. Өсөлтийг тогтмол хэмжиж, сайжруулна. </a:t>
+              <a:t>Тоо баримт, жишээ ашиглавал илүү үр дүнтэй. Бид хэрэглэгчдэдээ үнэ цэн бүтээхийг зорьдог. </a:t>
             </a:r>
             <a:endParaRPr/>
           </a:p>
@@ -26440,7 +26440,7 @@
                 <a:cs typeface="Arial"/>
                 <a:sym typeface="Arial"/>
               </a:rPr>
-              <a:t>Энэ хэсэгт өөрийн текстээ оруулна уу. Гол үзүүлэлтүүдээ товч дурдана. </a:t>
+              <a:t>Төслийн явц, үр дүнг энд харуулна. Багаараа хамтран шинэ шийдэл хэрэгжүүлнэ. </a:t>
             </a:r>
             <a:endParaRPr/>
           </a:p>
@@ -26726,7 +26726,7 @@
                 <a:cs typeface="Arial"/>
                 <a:sym typeface="Arial"/>
               </a:rPr>
-              <a:t>Хэрэглэгчийн хэрэгцээг нарийн судална. Чанар, хурд, найдвартай байдлыг эрхэмлэнэ. </a:t>
+              <a:t>Зах зээлийн судалгаанд үндэслэн шийдвэр гаргана. Дараагийн алхмуудаа тодорхой төлөвлөнө. </a:t>
             </a:r>
             <a:endParaRPr/>
           </a:p>
@@ -29859,7 +29859,7 @@
                 <a:cs typeface="Arial"/>
                 <a:sym typeface="Arial"/>
               </a:rPr>
-              <a:t>Шинэ боломжийг цаг алдалгүй ашиглана. Үр дүнд суурилсан шийдлийг санал болгоно. Харилцагчидтайгаа урт хугацааны түншлэл тогтооно.</a:t>
+              <a:t>Өсөлтийг тогтмол хэмжиж, сайжруулна. Энэ хэсэгт өөрийн текстээ оруулна уу. Гол үзүүлэлтүүдээ товч дурдана.</a:t>
             </a:r>
             <a:endParaRPr/>
           </a:p>
@@ -30044,7 +30044,7 @@
                 <a:cs typeface="Arial"/>
                 <a:sym typeface="Arial"/>
               </a:rPr>
-              <a:t>Технологийн шинэчлэлийг тасралтгүй нэвтрүүлнэ. Энд гол санаагаа бичнэ үү. Товч бөгөөд ойлгомжтой тайлбар.</a:t>
+              <a:t>Хэрэглэгчийн хэрэгцээг нарийн судална. Чанар, хурд, найдвартай байдлыг эрхэмлэнэ. Шинэ боломжийг цаг алдалгүй ашиглана.</a:t>
             </a:r>
             <a:endParaRPr/>
           </a:p>
@@ -30784,7 +30784,7 @@
                 <a:cs typeface="Arial"/>
                 <a:sym typeface="Arial"/>
               </a:rPr>
-              <a:t>Үзэгчдэд хэрэгтэй мэдээллийг өгнө. Тоо баримт, жишээ ашиглавал илүү үр дүнтэй. </a:t>
+              <a:t>Үр дүнд суурилсан шийдлийг санал болгоно. Харилцагчидтайгаа урт хугацааны түншлэл тогтооно. </a:t>
             </a:r>
             <a:endParaRPr/>
           </a:p>
@@ -30890,7 +30890,7 @@
                 <a:cs typeface="Arial"/>
                 <a:sym typeface="Arial"/>
               </a:rPr>
-              <a:t>Бид хэрэглэгчдэдээ үнэ цэн бүтээхийг зорьдог. Төслийн явц, үр дүнг энд харуулна. </a:t>
+              <a:t>Технологийн шинэчлэлийг тасралтгүй нэвтрүүлнэ. Энд гол санаагаа бичнэ үү. </a:t>
             </a:r>
             <a:endParaRPr/>
           </a:p>
